--- a/SBOMGuard-Presentation.pptx
+++ b/SBOMGuard-Presentation.pptx
@@ -2833,7 +2833,7 @@
         </p:nvSpPr>
         <p:spPr>
           <a:xfrm>
-            <a:off x="822960" y="5760720"/>
+            <a:off x="822960" y="5440680"/>
             <a:ext cx="10515600" cy="274320"/>
           </a:xfrm>
           <a:prstGeom prst="rect">
@@ -2872,34 +2872,73 @@
         </p:nvSpPr>
         <p:spPr>
           <a:xfrm>
-            <a:off x="822960" y="6080760"/>
-            <a:ext cx="10515600" cy="274320"/>
-          </a:xfrm>
-          <a:prstGeom prst="rect">
-            <a:avLst/>
-          </a:prstGeom>
-          <a:noFill/>
-          <a:ln/>
-        </p:spPr>
-        <p:txBody>
-          <a:bodyPr wrap="square" lIns="0" tIns="0" rIns="0" bIns="0" rtlCol="0" anchor="ctr"/>
-          <a:lstStyle/>
-          <a:p>
-            <a:pPr indent="0" marL="0">
-              <a:buNone/>
-            </a:pPr>
-            <a:r>
-              <a:rPr lang="en-US" sz="1200" b="1" dirty="0">
-                <a:solidFill>
-                  <a:srgbClr val="A89F92"/>
+            <a:off x="822960" y="5870448"/>
+            <a:ext cx="1828800" cy="256032"/>
+          </a:xfrm>
+          <a:prstGeom prst="rect">
+            <a:avLst/>
+          </a:prstGeom>
+          <a:noFill/>
+          <a:ln/>
+        </p:spPr>
+        <p:txBody>
+          <a:bodyPr wrap="square" lIns="0" tIns="0" rIns="0" bIns="0" rtlCol="0" anchor="ctr"/>
+          <a:lstStyle/>
+          <a:p>
+            <a:pPr indent="0" marL="0">
+              <a:buNone/>
+            </a:pPr>
+            <a:r>
+              <a:rPr lang="en-US" sz="1000" b="1" spc="200" kern="0" dirty="0">
+                <a:solidFill>
+                  <a:srgbClr val="7E766A"/>
                 </a:solidFill>
                 <a:latin typeface="Calibri" pitchFamily="34" charset="0"/>
                 <a:ea typeface="Calibri" pitchFamily="34" charset="-122"/>
                 <a:cs typeface="Calibri" pitchFamily="34" charset="-120"/>
               </a:rPr>
-              <a:t>Harish HJ   ·   github.com/harish-88279/SG-Hackathon</a:t>
-            </a:r>
-            <a:endParaRPr lang="en-US" sz="1200" dirty="0"/>
+              <a:t>SUBMITTED BY</a:t>
+            </a:r>
+            <a:endParaRPr lang="en-US" sz="1000" dirty="0"/>
+          </a:p>
+        </p:txBody>
+      </p:sp>
+      <p:sp>
+        <p:nvSpPr>
+          <p:cNvPr id="9" name="Text 7"/>
+          <p:cNvSpPr/>
+          <p:nvPr/>
+        </p:nvSpPr>
+        <p:spPr>
+          <a:xfrm>
+            <a:off x="822960" y="6144768"/>
+            <a:ext cx="7863840" cy="274320"/>
+          </a:xfrm>
+          <a:prstGeom prst="rect">
+            <a:avLst/>
+          </a:prstGeom>
+          <a:noFill/>
+          <a:ln/>
+        </p:spPr>
+        <p:txBody>
+          <a:bodyPr wrap="square" lIns="0" tIns="0" rIns="0" bIns="0" rtlCol="0" anchor="ctr"/>
+          <a:lstStyle/>
+          <a:p>
+            <a:pPr indent="0" marL="0">
+              <a:buNone/>
+            </a:pPr>
+            <a:r>
+              <a:rPr lang="en-US" sz="1300" b="1" dirty="0">
+                <a:solidFill>
+                  <a:srgbClr val="F2EEE7"/>
+                </a:solidFill>
+                <a:latin typeface="Calibri" pitchFamily="34" charset="0"/>
+                <a:ea typeface="Calibri" pitchFamily="34" charset="-122"/>
+                <a:cs typeface="Calibri" pitchFamily="34" charset="-120"/>
+              </a:rPr>
+              <a:t>Harish HJ  (23PC19)        S Murali Krishna  (23PC31)</a:t>
+            </a:r>
+            <a:endParaRPr lang="en-US" sz="1300" dirty="0"/>
           </a:p>
         </p:txBody>
       </p:sp>
@@ -4267,7 +4306,7 @@
                 <a:ea typeface="Calibri" pitchFamily="34" charset="-122"/>
                 <a:cs typeface="Calibri" pitchFamily="34" charset="-120"/>
               </a:rPr>
-              <a:t>REPOSITORY</a:t>
+              <a:t>SUBMITTED BY</a:t>
             </a:r>
             <a:endParaRPr lang="en-US" sz="1000" dirty="0"/>
           </a:p>
@@ -4306,7 +4345,7 @@
                 <a:ea typeface="Courier New" pitchFamily="34" charset="-122"/>
                 <a:cs typeface="Courier New" pitchFamily="34" charset="-120"/>
               </a:rPr>
-              <a:t>github.com/harish-88279/SG-Hackathon</a:t>
+              <a:t>Harish HJ (23PC19)   ·   S Murali Krishna (23PC31)</a:t>
             </a:r>
             <a:endParaRPr lang="en-US" sz="1150" dirty="0"/>
           </a:p>
@@ -4345,7 +4384,7 @@
                 <a:ea typeface="Calibri" pitchFamily="34" charset="-122"/>
                 <a:cs typeface="Calibri" pitchFamily="34" charset="-120"/>
               </a:rPr>
-              <a:t>DOCUMENTATION</a:t>
+              <a:t>REPOSITORY</a:t>
             </a:r>
             <a:endParaRPr lang="en-US" sz="1000" dirty="0"/>
           </a:p>
@@ -4384,7 +4423,7 @@
                 <a:ea typeface="Courier New" pitchFamily="34" charset="-122"/>
                 <a:cs typeface="Courier New" pitchFamily="34" charset="-120"/>
               </a:rPr>
-              <a:t>docs/DOCUMENTATION.md  ·  docs/DATA_DEFECT.md</a:t>
+              <a:t>github.com/harish-88279/SG-Hackathon</a:t>
             </a:r>
             <a:endParaRPr lang="en-US" sz="1150" dirty="0"/>
           </a:p>
